--- a/docs/pptx/auc3/ritu-auc3-linsubhr-ratio-aki2_10pct.pptx
+++ b/docs/pptx/auc3/ritu-auc3-linsubhr-ratio-aki2_10pct.pptx
@@ -2443,7 +2443,7 @@
           </p:nvSpPr>
           <p:spPr>
             <a:xfrm>
-              <a:off x="1012387" y="2073503"/>
+              <a:off x="1013326" y="2073503"/>
               <a:ext cx="0" cy="3649639"/>
             </a:xfrm>
             <a:custGeom>
@@ -2486,7 +2486,7 @@
           </p:nvSpPr>
           <p:spPr>
             <a:xfrm>
-              <a:off x="1914572" y="2073503"/>
+              <a:off x="1915271" y="2073503"/>
               <a:ext cx="0" cy="3649639"/>
             </a:xfrm>
             <a:custGeom>
@@ -2529,7 +2529,7 @@
           </p:nvSpPr>
           <p:spPr>
             <a:xfrm>
-              <a:off x="2816756" y="2073503"/>
+              <a:off x="2817216" y="2073503"/>
               <a:ext cx="0" cy="3649639"/>
             </a:xfrm>
             <a:custGeom>
@@ -2572,7 +2572,7 @@
           </p:nvSpPr>
           <p:spPr>
             <a:xfrm>
-              <a:off x="3718941" y="2073503"/>
+              <a:off x="3719160" y="2073503"/>
               <a:ext cx="0" cy="3649639"/>
             </a:xfrm>
             <a:custGeom>
@@ -2615,7 +2615,7 @@
           </p:nvSpPr>
           <p:spPr>
             <a:xfrm>
-              <a:off x="4621125" y="2073503"/>
+              <a:off x="4621105" y="2073503"/>
               <a:ext cx="0" cy="3649639"/>
             </a:xfrm>
             <a:custGeom>
@@ -2658,7 +2658,7 @@
           </p:nvSpPr>
           <p:spPr>
             <a:xfrm>
-              <a:off x="5523310" y="2073503"/>
+              <a:off x="5523050" y="2073503"/>
               <a:ext cx="0" cy="3649639"/>
             </a:xfrm>
             <a:custGeom>
@@ -2701,7 +2701,7 @@
           </p:nvSpPr>
           <p:spPr>
             <a:xfrm>
-              <a:off x="6425495" y="2073503"/>
+              <a:off x="6424995" y="2073503"/>
               <a:ext cx="0" cy="3649639"/>
             </a:xfrm>
             <a:custGeom>
@@ -2744,7 +2744,7 @@
           </p:nvSpPr>
           <p:spPr>
             <a:xfrm>
-              <a:off x="7327679" y="2073503"/>
+              <a:off x="7326940" y="2073503"/>
               <a:ext cx="0" cy="3649639"/>
             </a:xfrm>
             <a:custGeom>
@@ -2787,7 +2787,7 @@
           </p:nvSpPr>
           <p:spPr>
             <a:xfrm>
-              <a:off x="8229864" y="2073503"/>
+              <a:off x="8228885" y="2073503"/>
               <a:ext cx="0" cy="3649639"/>
             </a:xfrm>
             <a:custGeom>
@@ -3045,7 +3045,7 @@
           </p:nvSpPr>
           <p:spPr>
             <a:xfrm>
-              <a:off x="1463479" y="2073503"/>
+              <a:off x="1464298" y="2073503"/>
               <a:ext cx="0" cy="3649639"/>
             </a:xfrm>
             <a:custGeom>
@@ -3088,7 +3088,7 @@
           </p:nvSpPr>
           <p:spPr>
             <a:xfrm>
-              <a:off x="2365664" y="2073503"/>
+              <a:off x="2366243" y="2073503"/>
               <a:ext cx="0" cy="3649639"/>
             </a:xfrm>
             <a:custGeom>
@@ -3131,7 +3131,7 @@
           </p:nvSpPr>
           <p:spPr>
             <a:xfrm>
-              <a:off x="3267849" y="2073503"/>
+              <a:off x="3268188" y="2073503"/>
               <a:ext cx="0" cy="3649639"/>
             </a:xfrm>
             <a:custGeom>
@@ -3174,7 +3174,7 @@
           </p:nvSpPr>
           <p:spPr>
             <a:xfrm>
-              <a:off x="4170033" y="2073503"/>
+              <a:off x="4170133" y="2073503"/>
               <a:ext cx="0" cy="3649639"/>
             </a:xfrm>
             <a:custGeom>
@@ -3217,7 +3217,7 @@
           </p:nvSpPr>
           <p:spPr>
             <a:xfrm>
-              <a:off x="5072218" y="2073503"/>
+              <a:off x="5072078" y="2073503"/>
               <a:ext cx="0" cy="3649639"/>
             </a:xfrm>
             <a:custGeom>
@@ -3260,7 +3260,7 @@
           </p:nvSpPr>
           <p:spPr>
             <a:xfrm>
-              <a:off x="5974402" y="2073503"/>
+              <a:off x="5974022" y="2073503"/>
               <a:ext cx="0" cy="3649639"/>
             </a:xfrm>
             <a:custGeom>
@@ -3303,7 +3303,7 @@
           </p:nvSpPr>
           <p:spPr>
             <a:xfrm>
-              <a:off x="6876587" y="2073503"/>
+              <a:off x="6875967" y="2073503"/>
               <a:ext cx="0" cy="3649639"/>
             </a:xfrm>
             <a:custGeom>
@@ -3346,7 +3346,7 @@
           </p:nvSpPr>
           <p:spPr>
             <a:xfrm>
-              <a:off x="7778772" y="2073503"/>
+              <a:off x="7777912" y="2073503"/>
               <a:ext cx="0" cy="3649639"/>
             </a:xfrm>
             <a:custGeom>
@@ -3397,160 +3397,160 @@
               <a:pathLst>
                 <a:path w="7090630" h="3483746">
                   <a:moveTo>
-                    <a:pt x="2587224" y="0"/>
+                    <a:pt x="2593088" y="0"/>
                   </a:moveTo>
                   <a:lnTo>
-                    <a:pt x="2650033" y="701781"/>
-                  </a:lnTo>
-                  <a:lnTo>
-                    <a:pt x="2721655" y="1323260"/>
-                  </a:lnTo>
-                  <a:lnTo>
-                    <a:pt x="2793278" y="1805904"/>
-                  </a:lnTo>
-                  <a:lnTo>
-                    <a:pt x="2864901" y="2180727"/>
-                  </a:lnTo>
-                  <a:lnTo>
-                    <a:pt x="2936523" y="2471816"/>
-                  </a:lnTo>
-                  <a:lnTo>
-                    <a:pt x="3008146" y="2648632"/>
-                  </a:lnTo>
-                  <a:lnTo>
-                    <a:pt x="3079768" y="2621652"/>
-                  </a:lnTo>
-                  <a:lnTo>
-                    <a:pt x="3151391" y="2593800"/>
-                  </a:lnTo>
-                  <a:lnTo>
-                    <a:pt x="3223013" y="2565048"/>
-                  </a:lnTo>
-                  <a:lnTo>
-                    <a:pt x="3294636" y="2535368"/>
-                  </a:lnTo>
-                  <a:lnTo>
-                    <a:pt x="3366258" y="2504728"/>
-                  </a:lnTo>
-                  <a:lnTo>
-                    <a:pt x="3437881" y="2473099"/>
-                  </a:lnTo>
-                  <a:lnTo>
-                    <a:pt x="3509503" y="2440448"/>
-                  </a:lnTo>
-                  <a:lnTo>
-                    <a:pt x="3581126" y="2406742"/>
-                  </a:lnTo>
-                  <a:lnTo>
-                    <a:pt x="3652748" y="2371947"/>
-                  </a:lnTo>
-                  <a:lnTo>
-                    <a:pt x="3724371" y="2336028"/>
-                  </a:lnTo>
-                  <a:lnTo>
-                    <a:pt x="3795993" y="2298949"/>
-                  </a:lnTo>
-                  <a:lnTo>
-                    <a:pt x="3867616" y="2260671"/>
-                  </a:lnTo>
-                  <a:lnTo>
-                    <a:pt x="3939238" y="2221157"/>
-                  </a:lnTo>
-                  <a:lnTo>
-                    <a:pt x="4010861" y="2180366"/>
-                  </a:lnTo>
-                  <a:lnTo>
-                    <a:pt x="4082483" y="2138258"/>
-                  </a:lnTo>
-                  <a:lnTo>
-                    <a:pt x="4154106" y="2094789"/>
-                  </a:lnTo>
-                  <a:lnTo>
-                    <a:pt x="4225729" y="2049916"/>
-                  </a:lnTo>
-                  <a:lnTo>
-                    <a:pt x="4297351" y="2003593"/>
-                  </a:lnTo>
-                  <a:lnTo>
-                    <a:pt x="4368974" y="1955773"/>
-                  </a:lnTo>
-                  <a:lnTo>
-                    <a:pt x="4440596" y="1906409"/>
-                  </a:lnTo>
-                  <a:lnTo>
-                    <a:pt x="4512219" y="1855450"/>
-                  </a:lnTo>
-                  <a:lnTo>
-                    <a:pt x="4583841" y="1802844"/>
-                  </a:lnTo>
-                  <a:lnTo>
-                    <a:pt x="4655464" y="1748539"/>
-                  </a:lnTo>
-                  <a:lnTo>
-                    <a:pt x="4727086" y="1692480"/>
-                  </a:lnTo>
-                  <a:lnTo>
-                    <a:pt x="4798709" y="1634609"/>
-                  </a:lnTo>
-                  <a:lnTo>
-                    <a:pt x="4870331" y="1574869"/>
-                  </a:lnTo>
-                  <a:lnTo>
-                    <a:pt x="4941954" y="1513198"/>
-                  </a:lnTo>
-                  <a:lnTo>
-                    <a:pt x="5013576" y="1449535"/>
-                  </a:lnTo>
-                  <a:lnTo>
-                    <a:pt x="5085199" y="1383816"/>
-                  </a:lnTo>
-                  <a:lnTo>
-                    <a:pt x="5156821" y="1315973"/>
-                  </a:lnTo>
-                  <a:lnTo>
-                    <a:pt x="5228444" y="1245939"/>
-                  </a:lnTo>
-                  <a:lnTo>
-                    <a:pt x="5300066" y="1173642"/>
-                  </a:lnTo>
-                  <a:lnTo>
-                    <a:pt x="5371689" y="1099009"/>
-                  </a:lnTo>
-                  <a:lnTo>
-                    <a:pt x="5443311" y="1021965"/>
-                  </a:lnTo>
-                  <a:lnTo>
-                    <a:pt x="5514934" y="942432"/>
-                  </a:lnTo>
-                  <a:lnTo>
-                    <a:pt x="5586557" y="860329"/>
-                  </a:lnTo>
-                  <a:lnTo>
-                    <a:pt x="5658179" y="775574"/>
-                  </a:lnTo>
-                  <a:lnTo>
-                    <a:pt x="5729802" y="688081"/>
-                  </a:lnTo>
-                  <a:lnTo>
-                    <a:pt x="5801424" y="597761"/>
-                  </a:lnTo>
-                  <a:lnTo>
-                    <a:pt x="5873047" y="504523"/>
-                  </a:lnTo>
-                  <a:lnTo>
-                    <a:pt x="5944669" y="408273"/>
-                  </a:lnTo>
-                  <a:lnTo>
-                    <a:pt x="6016292" y="308913"/>
-                  </a:lnTo>
-                  <a:lnTo>
-                    <a:pt x="6087914" y="206343"/>
-                  </a:lnTo>
-                  <a:lnTo>
-                    <a:pt x="6159537" y="100460"/>
-                  </a:lnTo>
-                  <a:lnTo>
-                    <a:pt x="6225364" y="0"/>
+                    <a:pt x="2650033" y="648615"/>
+                  </a:lnTo>
+                  <a:lnTo>
+                    <a:pt x="2721655" y="1282120"/>
+                  </a:lnTo>
+                  <a:lnTo>
+                    <a:pt x="2793278" y="1774069"/>
+                  </a:lnTo>
+                  <a:lnTo>
+                    <a:pt x="2864901" y="2156093"/>
+                  </a:lnTo>
+                  <a:lnTo>
+                    <a:pt x="2936523" y="2452754"/>
+                  </a:lnTo>
+                  <a:lnTo>
+                    <a:pt x="3008146" y="2650582"/>
+                  </a:lnTo>
+                  <a:lnTo>
+                    <a:pt x="3079768" y="2623658"/>
+                  </a:lnTo>
+                  <a:lnTo>
+                    <a:pt x="3151391" y="2595863"/>
+                  </a:lnTo>
+                  <a:lnTo>
+                    <a:pt x="3223013" y="2567171"/>
+                  </a:lnTo>
+                  <a:lnTo>
+                    <a:pt x="3294636" y="2537551"/>
+                  </a:lnTo>
+                  <a:lnTo>
+                    <a:pt x="3366258" y="2506974"/>
+                  </a:lnTo>
+                  <a:lnTo>
+                    <a:pt x="3437881" y="2475408"/>
+                  </a:lnTo>
+                  <a:lnTo>
+                    <a:pt x="3509503" y="2442823"/>
+                  </a:lnTo>
+                  <a:lnTo>
+                    <a:pt x="3581126" y="2409184"/>
+                  </a:lnTo>
+                  <a:lnTo>
+                    <a:pt x="3652748" y="2374459"/>
+                  </a:lnTo>
+                  <a:lnTo>
+                    <a:pt x="3724371" y="2338611"/>
+                  </a:lnTo>
+                  <a:lnTo>
+                    <a:pt x="3795993" y="2301605"/>
+                  </a:lnTo>
+                  <a:lnTo>
+                    <a:pt x="3867616" y="2263403"/>
+                  </a:lnTo>
+                  <a:lnTo>
+                    <a:pt x="3939238" y="2223967"/>
+                  </a:lnTo>
+                  <a:lnTo>
+                    <a:pt x="4010861" y="2183256"/>
+                  </a:lnTo>
+                  <a:lnTo>
+                    <a:pt x="4082483" y="2141229"/>
+                  </a:lnTo>
+                  <a:lnTo>
+                    <a:pt x="4154106" y="2097845"/>
+                  </a:lnTo>
+                  <a:lnTo>
+                    <a:pt x="4225729" y="2053058"/>
+                  </a:lnTo>
+                  <a:lnTo>
+                    <a:pt x="4297351" y="2006824"/>
+                  </a:lnTo>
+                  <a:lnTo>
+                    <a:pt x="4368974" y="1959096"/>
+                  </a:lnTo>
+                  <a:lnTo>
+                    <a:pt x="4440596" y="1909825"/>
+                  </a:lnTo>
+                  <a:lnTo>
+                    <a:pt x="4512219" y="1858963"/>
+                  </a:lnTo>
+                  <a:lnTo>
+                    <a:pt x="4583841" y="1806456"/>
+                  </a:lnTo>
+                  <a:lnTo>
+                    <a:pt x="4655464" y="1752253"/>
+                  </a:lnTo>
+                  <a:lnTo>
+                    <a:pt x="4727086" y="1696298"/>
+                  </a:lnTo>
+                  <a:lnTo>
+                    <a:pt x="4798709" y="1638535"/>
+                  </a:lnTo>
+                  <a:lnTo>
+                    <a:pt x="4870331" y="1578906"/>
+                  </a:lnTo>
+                  <a:lnTo>
+                    <a:pt x="4941954" y="1517349"/>
+                  </a:lnTo>
+                  <a:lnTo>
+                    <a:pt x="5013576" y="1453803"/>
+                  </a:lnTo>
+                  <a:lnTo>
+                    <a:pt x="5085199" y="1388204"/>
+                  </a:lnTo>
+                  <a:lnTo>
+                    <a:pt x="5156821" y="1320484"/>
+                  </a:lnTo>
+                  <a:lnTo>
+                    <a:pt x="5228444" y="1250576"/>
+                  </a:lnTo>
+                  <a:lnTo>
+                    <a:pt x="5300066" y="1178409"/>
+                  </a:lnTo>
+                  <a:lnTo>
+                    <a:pt x="5371689" y="1103910"/>
+                  </a:lnTo>
+                  <a:lnTo>
+                    <a:pt x="5443311" y="1027004"/>
+                  </a:lnTo>
+                  <a:lnTo>
+                    <a:pt x="5514934" y="947612"/>
+                  </a:lnTo>
+                  <a:lnTo>
+                    <a:pt x="5586557" y="865654"/>
+                  </a:lnTo>
+                  <a:lnTo>
+                    <a:pt x="5658179" y="781048"/>
+                  </a:lnTo>
+                  <a:lnTo>
+                    <a:pt x="5729802" y="693708"/>
+                  </a:lnTo>
+                  <a:lnTo>
+                    <a:pt x="5801424" y="603545"/>
+                  </a:lnTo>
+                  <a:lnTo>
+                    <a:pt x="5873047" y="510469"/>
+                  </a:lnTo>
+                  <a:lnTo>
+                    <a:pt x="5944669" y="414385"/>
+                  </a:lnTo>
+                  <a:lnTo>
+                    <a:pt x="6016292" y="315196"/>
+                  </a:lnTo>
+                  <a:lnTo>
+                    <a:pt x="6087914" y="212801"/>
+                  </a:lnTo>
+                  <a:lnTo>
+                    <a:pt x="6159537" y="107098"/>
+                  </a:lnTo>
+                  <a:lnTo>
+                    <a:pt x="6229832" y="0"/>
                   </a:lnTo>
                   <a:lnTo>
                     <a:pt x="7090630" y="0"/>
@@ -3604,256 +3604,256 @@
                     <a:pt x="6016292" y="3483727"/>
                   </a:lnTo>
                   <a:lnTo>
-                    <a:pt x="5944669" y="3483722"/>
-                  </a:lnTo>
-                  <a:lnTo>
-                    <a:pt x="5873047" y="3483715"/>
+                    <a:pt x="5944669" y="3483721"/>
+                  </a:lnTo>
+                  <a:lnTo>
+                    <a:pt x="5873047" y="3483714"/>
                   </a:lnTo>
                   <a:lnTo>
                     <a:pt x="5801424" y="3483705"/>
                   </a:lnTo>
                   <a:lnTo>
-                    <a:pt x="5729802" y="3483694"/>
-                  </a:lnTo>
-                  <a:lnTo>
-                    <a:pt x="5658179" y="3483678"/>
-                  </a:lnTo>
-                  <a:lnTo>
-                    <a:pt x="5586557" y="3483659"/>
-                  </a:lnTo>
-                  <a:lnTo>
-                    <a:pt x="5514934" y="3483634"/>
-                  </a:lnTo>
-                  <a:lnTo>
-                    <a:pt x="5443311" y="3483601"/>
-                  </a:lnTo>
-                  <a:lnTo>
-                    <a:pt x="5371689" y="3483559"/>
-                  </a:lnTo>
-                  <a:lnTo>
-                    <a:pt x="5300066" y="3483506"/>
-                  </a:lnTo>
-                  <a:lnTo>
-                    <a:pt x="5228444" y="3483436"/>
-                  </a:lnTo>
-                  <a:lnTo>
-                    <a:pt x="5156821" y="3483347"/>
-                  </a:lnTo>
-                  <a:lnTo>
-                    <a:pt x="5085199" y="3483232"/>
-                  </a:lnTo>
-                  <a:lnTo>
-                    <a:pt x="5013576" y="3483084"/>
-                  </a:lnTo>
-                  <a:lnTo>
-                    <a:pt x="4941954" y="3482894"/>
-                  </a:lnTo>
-                  <a:lnTo>
-                    <a:pt x="4870331" y="3482649"/>
-                  </a:lnTo>
-                  <a:lnTo>
-                    <a:pt x="4798709" y="3482333"/>
-                  </a:lnTo>
-                  <a:lnTo>
-                    <a:pt x="4727086" y="3481926"/>
-                  </a:lnTo>
-                  <a:lnTo>
-                    <a:pt x="4655464" y="3481402"/>
-                  </a:lnTo>
-                  <a:lnTo>
-                    <a:pt x="4583841" y="3480728"/>
-                  </a:lnTo>
-                  <a:lnTo>
-                    <a:pt x="4512219" y="3479860"/>
-                  </a:lnTo>
-                  <a:lnTo>
-                    <a:pt x="4440596" y="3478742"/>
-                  </a:lnTo>
-                  <a:lnTo>
-                    <a:pt x="4368974" y="3477303"/>
-                  </a:lnTo>
-                  <a:lnTo>
-                    <a:pt x="4297351" y="3475449"/>
-                  </a:lnTo>
-                  <a:lnTo>
-                    <a:pt x="4225729" y="3473062"/>
-                  </a:lnTo>
-                  <a:lnTo>
-                    <a:pt x="4154106" y="3469989"/>
-                  </a:lnTo>
-                  <a:lnTo>
-                    <a:pt x="4082483" y="3466031"/>
-                  </a:lnTo>
-                  <a:lnTo>
-                    <a:pt x="4010861" y="3460935"/>
-                  </a:lnTo>
-                  <a:lnTo>
-                    <a:pt x="3939238" y="3454373"/>
-                  </a:lnTo>
-                  <a:lnTo>
-                    <a:pt x="3867616" y="3445924"/>
-                  </a:lnTo>
-                  <a:lnTo>
-                    <a:pt x="3795993" y="3435044"/>
-                  </a:lnTo>
-                  <a:lnTo>
-                    <a:pt x="3724371" y="3421035"/>
-                  </a:lnTo>
-                  <a:lnTo>
-                    <a:pt x="3652748" y="3402995"/>
-                  </a:lnTo>
-                  <a:lnTo>
-                    <a:pt x="3581126" y="3379767"/>
-                  </a:lnTo>
-                  <a:lnTo>
-                    <a:pt x="3509503" y="3349856"/>
-                  </a:lnTo>
-                  <a:lnTo>
-                    <a:pt x="3437881" y="3311342"/>
-                  </a:lnTo>
-                  <a:lnTo>
-                    <a:pt x="3366258" y="3261748"/>
-                  </a:lnTo>
-                  <a:lnTo>
-                    <a:pt x="3294636" y="3197889"/>
-                  </a:lnTo>
-                  <a:lnTo>
-                    <a:pt x="3223013" y="3115660"/>
-                  </a:lnTo>
-                  <a:lnTo>
-                    <a:pt x="3151391" y="3009777"/>
-                  </a:lnTo>
-                  <a:lnTo>
-                    <a:pt x="3079768" y="2873437"/>
-                  </a:lnTo>
-                  <a:lnTo>
-                    <a:pt x="3008146" y="2697877"/>
-                  </a:lnTo>
-                  <a:lnTo>
-                    <a:pt x="2936523" y="2674768"/>
-                  </a:lnTo>
-                  <a:lnTo>
-                    <a:pt x="2864901" y="2700085"/>
-                  </a:lnTo>
-                  <a:lnTo>
-                    <a:pt x="2793278" y="2724611"/>
-                  </a:lnTo>
-                  <a:lnTo>
-                    <a:pt x="2721655" y="2748369"/>
-                  </a:lnTo>
-                  <a:lnTo>
-                    <a:pt x="2650033" y="2771383"/>
-                  </a:lnTo>
-                  <a:lnTo>
-                    <a:pt x="2578410" y="2793677"/>
-                  </a:lnTo>
-                  <a:lnTo>
-                    <a:pt x="2506788" y="2815274"/>
-                  </a:lnTo>
-                  <a:lnTo>
-                    <a:pt x="2435165" y="2836194"/>
-                  </a:lnTo>
-                  <a:lnTo>
-                    <a:pt x="2363543" y="2856460"/>
-                  </a:lnTo>
-                  <a:lnTo>
-                    <a:pt x="2291920" y="2876092"/>
-                  </a:lnTo>
-                  <a:lnTo>
-                    <a:pt x="2220298" y="2895109"/>
-                  </a:lnTo>
-                  <a:lnTo>
-                    <a:pt x="2148675" y="2913531"/>
-                  </a:lnTo>
-                  <a:lnTo>
-                    <a:pt x="2077053" y="2931376"/>
-                  </a:lnTo>
-                  <a:lnTo>
-                    <a:pt x="2005430" y="2948663"/>
-                  </a:lnTo>
-                  <a:lnTo>
-                    <a:pt x="1933808" y="2965409"/>
-                  </a:lnTo>
-                  <a:lnTo>
-                    <a:pt x="1862185" y="2981631"/>
-                  </a:lnTo>
-                  <a:lnTo>
-                    <a:pt x="1790563" y="2997346"/>
-                  </a:lnTo>
-                  <a:lnTo>
-                    <a:pt x="1718940" y="3012568"/>
-                  </a:lnTo>
-                  <a:lnTo>
-                    <a:pt x="1647318" y="3027314"/>
-                  </a:lnTo>
-                  <a:lnTo>
-                    <a:pt x="1575695" y="3041599"/>
-                  </a:lnTo>
-                  <a:lnTo>
-                    <a:pt x="1504073" y="3055436"/>
-                  </a:lnTo>
-                  <a:lnTo>
-                    <a:pt x="1432450" y="3068840"/>
-                  </a:lnTo>
-                  <a:lnTo>
-                    <a:pt x="1360827" y="3081825"/>
-                  </a:lnTo>
-                  <a:lnTo>
-                    <a:pt x="1289205" y="3094404"/>
-                  </a:lnTo>
-                  <a:lnTo>
-                    <a:pt x="1217582" y="3106589"/>
-                  </a:lnTo>
-                  <a:lnTo>
-                    <a:pt x="1145960" y="3118392"/>
-                  </a:lnTo>
-                  <a:lnTo>
-                    <a:pt x="1074337" y="3129826"/>
-                  </a:lnTo>
-                  <a:lnTo>
-                    <a:pt x="1002715" y="3140903"/>
-                  </a:lnTo>
-                  <a:lnTo>
-                    <a:pt x="931092" y="3151632"/>
-                  </a:lnTo>
-                  <a:lnTo>
-                    <a:pt x="859470" y="3162026"/>
-                  </a:lnTo>
-                  <a:lnTo>
-                    <a:pt x="787847" y="3172095"/>
-                  </a:lnTo>
-                  <a:lnTo>
-                    <a:pt x="716225" y="3181848"/>
-                  </a:lnTo>
-                  <a:lnTo>
-                    <a:pt x="644602" y="3191296"/>
-                  </a:lnTo>
-                  <a:lnTo>
-                    <a:pt x="572980" y="3200449"/>
-                  </a:lnTo>
-                  <a:lnTo>
-                    <a:pt x="501357" y="3209315"/>
-                  </a:lnTo>
-                  <a:lnTo>
-                    <a:pt x="429735" y="3217904"/>
-                  </a:lnTo>
-                  <a:lnTo>
-                    <a:pt x="358112" y="3226224"/>
-                  </a:lnTo>
-                  <a:lnTo>
-                    <a:pt x="286490" y="3234283"/>
-                  </a:lnTo>
-                  <a:lnTo>
-                    <a:pt x="214867" y="3242090"/>
-                  </a:lnTo>
-                  <a:lnTo>
-                    <a:pt x="143245" y="3249653"/>
-                  </a:lnTo>
-                  <a:lnTo>
-                    <a:pt x="71622" y="3256979"/>
-                  </a:lnTo>
-                  <a:lnTo>
-                    <a:pt x="0" y="3264076"/>
+                    <a:pt x="5729802" y="3483693"/>
+                  </a:lnTo>
+                  <a:lnTo>
+                    <a:pt x="5658179" y="3483677"/>
+                  </a:lnTo>
+                  <a:lnTo>
+                    <a:pt x="5586557" y="3483657"/>
+                  </a:lnTo>
+                  <a:lnTo>
+                    <a:pt x="5514934" y="3483632"/>
+                  </a:lnTo>
+                  <a:lnTo>
+                    <a:pt x="5443311" y="3483599"/>
+                  </a:lnTo>
+                  <a:lnTo>
+                    <a:pt x="5371689" y="3483556"/>
+                  </a:lnTo>
+                  <a:lnTo>
+                    <a:pt x="5300066" y="3483502"/>
+                  </a:lnTo>
+                  <a:lnTo>
+                    <a:pt x="5228444" y="3483431"/>
+                  </a:lnTo>
+                  <a:lnTo>
+                    <a:pt x="5156821" y="3483340"/>
+                  </a:lnTo>
+                  <a:lnTo>
+                    <a:pt x="5085199" y="3483224"/>
+                  </a:lnTo>
+                  <a:lnTo>
+                    <a:pt x="5013576" y="3483073"/>
+                  </a:lnTo>
+                  <a:lnTo>
+                    <a:pt x="4941954" y="3482879"/>
+                  </a:lnTo>
+                  <a:lnTo>
+                    <a:pt x="4870331" y="3482630"/>
+                  </a:lnTo>
+                  <a:lnTo>
+                    <a:pt x="4798709" y="3482309"/>
+                  </a:lnTo>
+                  <a:lnTo>
+                    <a:pt x="4727086" y="3481895"/>
+                  </a:lnTo>
+                  <a:lnTo>
+                    <a:pt x="4655464" y="3481362"/>
+                  </a:lnTo>
+                  <a:lnTo>
+                    <a:pt x="4583841" y="3480676"/>
+                  </a:lnTo>
+                  <a:lnTo>
+                    <a:pt x="4512219" y="3479793"/>
+                  </a:lnTo>
+                  <a:lnTo>
+                    <a:pt x="4440596" y="3478655"/>
+                  </a:lnTo>
+                  <a:lnTo>
+                    <a:pt x="4368974" y="3477190"/>
+                  </a:lnTo>
+                  <a:lnTo>
+                    <a:pt x="4297351" y="3475303"/>
+                  </a:lnTo>
+                  <a:lnTo>
+                    <a:pt x="4225729" y="3472874"/>
+                  </a:lnTo>
+                  <a:lnTo>
+                    <a:pt x="4154106" y="3469746"/>
+                  </a:lnTo>
+                  <a:lnTo>
+                    <a:pt x="4082483" y="3465717"/>
+                  </a:lnTo>
+                  <a:lnTo>
+                    <a:pt x="4010861" y="3460529"/>
+                  </a:lnTo>
+                  <a:lnTo>
+                    <a:pt x="3939238" y="3453848"/>
+                  </a:lnTo>
+                  <a:lnTo>
+                    <a:pt x="3867616" y="3445245"/>
+                  </a:lnTo>
+                  <a:lnTo>
+                    <a:pt x="3795993" y="3434167"/>
+                  </a:lnTo>
+                  <a:lnTo>
+                    <a:pt x="3724371" y="3419901"/>
+                  </a:lnTo>
+                  <a:lnTo>
+                    <a:pt x="3652748" y="3401530"/>
+                  </a:lnTo>
+                  <a:lnTo>
+                    <a:pt x="3581126" y="3377872"/>
+                  </a:lnTo>
+                  <a:lnTo>
+                    <a:pt x="3509503" y="3347407"/>
+                  </a:lnTo>
+                  <a:lnTo>
+                    <a:pt x="3437881" y="3308177"/>
+                  </a:lnTo>
+                  <a:lnTo>
+                    <a:pt x="3366258" y="3257658"/>
+                  </a:lnTo>
+                  <a:lnTo>
+                    <a:pt x="3294636" y="3192602"/>
+                  </a:lnTo>
+                  <a:lnTo>
+                    <a:pt x="3223013" y="3108827"/>
+                  </a:lnTo>
+                  <a:lnTo>
+                    <a:pt x="3151391" y="3000947"/>
+                  </a:lnTo>
+                  <a:lnTo>
+                    <a:pt x="3079768" y="2862024"/>
+                  </a:lnTo>
+                  <a:lnTo>
+                    <a:pt x="3008146" y="2683127"/>
+                  </a:lnTo>
+                  <a:lnTo>
+                    <a:pt x="2936523" y="2676664"/>
+                  </a:lnTo>
+                  <a:lnTo>
+                    <a:pt x="2864901" y="2701929"/>
+                  </a:lnTo>
+                  <a:lnTo>
+                    <a:pt x="2793278" y="2726403"/>
+                  </a:lnTo>
+                  <a:lnTo>
+                    <a:pt x="2721655" y="2750112"/>
+                  </a:lnTo>
+                  <a:lnTo>
+                    <a:pt x="2650033" y="2773077"/>
+                  </a:lnTo>
+                  <a:lnTo>
+                    <a:pt x="2578410" y="2795324"/>
+                  </a:lnTo>
+                  <a:lnTo>
+                    <a:pt x="2506788" y="2816875"/>
+                  </a:lnTo>
+                  <a:lnTo>
+                    <a:pt x="2435165" y="2837751"/>
+                  </a:lnTo>
+                  <a:lnTo>
+                    <a:pt x="2363543" y="2857973"/>
+                  </a:lnTo>
+                  <a:lnTo>
+                    <a:pt x="2291920" y="2877563"/>
+                  </a:lnTo>
+                  <a:lnTo>
+                    <a:pt x="2220298" y="2896539"/>
+                  </a:lnTo>
+                  <a:lnTo>
+                    <a:pt x="2148675" y="2914921"/>
+                  </a:lnTo>
+                  <a:lnTo>
+                    <a:pt x="2077053" y="2932728"/>
+                  </a:lnTo>
+                  <a:lnTo>
+                    <a:pt x="2005430" y="2949977"/>
+                  </a:lnTo>
+                  <a:lnTo>
+                    <a:pt x="1933808" y="2966686"/>
+                  </a:lnTo>
+                  <a:lnTo>
+                    <a:pt x="1862185" y="2982872"/>
+                  </a:lnTo>
+                  <a:lnTo>
+                    <a:pt x="1790563" y="2998552"/>
+                  </a:lnTo>
+                  <a:lnTo>
+                    <a:pt x="1718940" y="3013741"/>
+                  </a:lnTo>
+                  <a:lnTo>
+                    <a:pt x="1647318" y="3028454"/>
+                  </a:lnTo>
+                  <a:lnTo>
+                    <a:pt x="1575695" y="3042706"/>
+                  </a:lnTo>
+                  <a:lnTo>
+                    <a:pt x="1504073" y="3056513"/>
+                  </a:lnTo>
+                  <a:lnTo>
+                    <a:pt x="1432450" y="3069887"/>
+                  </a:lnTo>
+                  <a:lnTo>
+                    <a:pt x="1360827" y="3082843"/>
+                  </a:lnTo>
+                  <a:lnTo>
+                    <a:pt x="1289205" y="3095393"/>
+                  </a:lnTo>
+                  <a:lnTo>
+                    <a:pt x="1217582" y="3107550"/>
+                  </a:lnTo>
+                  <a:lnTo>
+                    <a:pt x="1145960" y="3119326"/>
+                  </a:lnTo>
+                  <a:lnTo>
+                    <a:pt x="1074337" y="3130734"/>
+                  </a:lnTo>
+                  <a:lnTo>
+                    <a:pt x="1002715" y="3141785"/>
+                  </a:lnTo>
+                  <a:lnTo>
+                    <a:pt x="931092" y="3152490"/>
+                  </a:lnTo>
+                  <a:lnTo>
+                    <a:pt x="859470" y="3162860"/>
+                  </a:lnTo>
+                  <a:lnTo>
+                    <a:pt x="787847" y="3172905"/>
+                  </a:lnTo>
+                  <a:lnTo>
+                    <a:pt x="716225" y="3182635"/>
+                  </a:lnTo>
+                  <a:lnTo>
+                    <a:pt x="644602" y="3192062"/>
+                  </a:lnTo>
+                  <a:lnTo>
+                    <a:pt x="572980" y="3201193"/>
+                  </a:lnTo>
+                  <a:lnTo>
+                    <a:pt x="501357" y="3210038"/>
+                  </a:lnTo>
+                  <a:lnTo>
+                    <a:pt x="429735" y="3218606"/>
+                  </a:lnTo>
+                  <a:lnTo>
+                    <a:pt x="358112" y="3226906"/>
+                  </a:lnTo>
+                  <a:lnTo>
+                    <a:pt x="286490" y="3234946"/>
+                  </a:lnTo>
+                  <a:lnTo>
+                    <a:pt x="214867" y="3242735"/>
+                  </a:lnTo>
+                  <a:lnTo>
+                    <a:pt x="143245" y="3250279"/>
+                  </a:lnTo>
+                  <a:lnTo>
+                    <a:pt x="71622" y="3257588"/>
+                  </a:lnTo>
+                  <a:lnTo>
+                    <a:pt x="0" y="3264668"/>
                   </a:lnTo>
                   <a:lnTo>
                     <a:pt x="0" y="0"/>
@@ -3882,168 +3882,168 @@
           </p:nvSpPr>
           <p:spPr>
             <a:xfrm>
-              <a:off x="3759273" y="2073503"/>
-              <a:ext cx="3638140" cy="2648632"/>
+              <a:off x="3765137" y="2073503"/>
+              <a:ext cx="3636744" cy="2650582"/>
             </a:xfrm>
             <a:custGeom>
               <a:avLst/>
               <a:pathLst>
-                <a:path w="3638140" h="2648632">
+                <a:path w="3636744" h="2650582">
                   <a:moveTo>
                     <a:pt x="0" y="0"/>
                   </a:moveTo>
                   <a:lnTo>
-                    <a:pt x="62809" y="701781"/>
-                  </a:lnTo>
-                  <a:lnTo>
-                    <a:pt x="134431" y="1323260"/>
-                  </a:lnTo>
-                  <a:lnTo>
-                    <a:pt x="206054" y="1805904"/>
-                  </a:lnTo>
-                  <a:lnTo>
-                    <a:pt x="277676" y="2180727"/>
-                  </a:lnTo>
-                  <a:lnTo>
-                    <a:pt x="349299" y="2471816"/>
-                  </a:lnTo>
-                  <a:lnTo>
-                    <a:pt x="420922" y="2648632"/>
-                  </a:lnTo>
-                  <a:lnTo>
-                    <a:pt x="492544" y="2621652"/>
-                  </a:lnTo>
-                  <a:lnTo>
-                    <a:pt x="564167" y="2593800"/>
-                  </a:lnTo>
-                  <a:lnTo>
-                    <a:pt x="635789" y="2565048"/>
-                  </a:lnTo>
-                  <a:lnTo>
-                    <a:pt x="707412" y="2535368"/>
-                  </a:lnTo>
-                  <a:lnTo>
-                    <a:pt x="779034" y="2504728"/>
-                  </a:lnTo>
-                  <a:lnTo>
-                    <a:pt x="850657" y="2473099"/>
-                  </a:lnTo>
-                  <a:lnTo>
-                    <a:pt x="922279" y="2440448"/>
-                  </a:lnTo>
-                  <a:lnTo>
-                    <a:pt x="993902" y="2406742"/>
-                  </a:lnTo>
-                  <a:lnTo>
-                    <a:pt x="1065524" y="2371947"/>
-                  </a:lnTo>
-                  <a:lnTo>
-                    <a:pt x="1137147" y="2336028"/>
-                  </a:lnTo>
-                  <a:lnTo>
-                    <a:pt x="1208769" y="2298949"/>
-                  </a:lnTo>
-                  <a:lnTo>
-                    <a:pt x="1280392" y="2260671"/>
-                  </a:lnTo>
-                  <a:lnTo>
-                    <a:pt x="1352014" y="2221157"/>
-                  </a:lnTo>
-                  <a:lnTo>
-                    <a:pt x="1423637" y="2180366"/>
-                  </a:lnTo>
-                  <a:lnTo>
-                    <a:pt x="1495259" y="2138258"/>
-                  </a:lnTo>
-                  <a:lnTo>
-                    <a:pt x="1566882" y="2094789"/>
-                  </a:lnTo>
-                  <a:lnTo>
-                    <a:pt x="1638504" y="2049916"/>
-                  </a:lnTo>
-                  <a:lnTo>
-                    <a:pt x="1710127" y="2003593"/>
-                  </a:lnTo>
-                  <a:lnTo>
-                    <a:pt x="1781750" y="1955773"/>
-                  </a:lnTo>
-                  <a:lnTo>
-                    <a:pt x="1853372" y="1906409"/>
-                  </a:lnTo>
-                  <a:lnTo>
-                    <a:pt x="1924995" y="1855450"/>
-                  </a:lnTo>
-                  <a:lnTo>
-                    <a:pt x="1996617" y="1802844"/>
-                  </a:lnTo>
-                  <a:lnTo>
-                    <a:pt x="2068240" y="1748539"/>
-                  </a:lnTo>
-                  <a:lnTo>
-                    <a:pt x="2139862" y="1692480"/>
-                  </a:lnTo>
-                  <a:lnTo>
-                    <a:pt x="2211485" y="1634609"/>
-                  </a:lnTo>
-                  <a:lnTo>
-                    <a:pt x="2283107" y="1574869"/>
-                  </a:lnTo>
-                  <a:lnTo>
-                    <a:pt x="2354730" y="1513198"/>
-                  </a:lnTo>
-                  <a:lnTo>
-                    <a:pt x="2426352" y="1449535"/>
-                  </a:lnTo>
-                  <a:lnTo>
-                    <a:pt x="2497975" y="1383816"/>
-                  </a:lnTo>
-                  <a:lnTo>
-                    <a:pt x="2569597" y="1315973"/>
-                  </a:lnTo>
-                  <a:lnTo>
-                    <a:pt x="2641220" y="1245939"/>
-                  </a:lnTo>
-                  <a:lnTo>
-                    <a:pt x="2712842" y="1173642"/>
-                  </a:lnTo>
-                  <a:lnTo>
-                    <a:pt x="2784465" y="1099009"/>
-                  </a:lnTo>
-                  <a:lnTo>
-                    <a:pt x="2856087" y="1021965"/>
-                  </a:lnTo>
-                  <a:lnTo>
-                    <a:pt x="2927710" y="942432"/>
-                  </a:lnTo>
-                  <a:lnTo>
-                    <a:pt x="2999332" y="860329"/>
-                  </a:lnTo>
-                  <a:lnTo>
-                    <a:pt x="3070955" y="775574"/>
-                  </a:lnTo>
-                  <a:lnTo>
-                    <a:pt x="3142578" y="688081"/>
-                  </a:lnTo>
-                  <a:lnTo>
-                    <a:pt x="3214200" y="597761"/>
-                  </a:lnTo>
-                  <a:lnTo>
-                    <a:pt x="3285823" y="504523"/>
-                  </a:lnTo>
-                  <a:lnTo>
-                    <a:pt x="3357445" y="408273"/>
-                  </a:lnTo>
-                  <a:lnTo>
-                    <a:pt x="3429068" y="308913"/>
-                  </a:lnTo>
-                  <a:lnTo>
-                    <a:pt x="3500690" y="206343"/>
-                  </a:lnTo>
-                  <a:lnTo>
-                    <a:pt x="3572313" y="100460"/>
-                  </a:lnTo>
-                  <a:lnTo>
-                    <a:pt x="3638140" y="0"/>
+                    <a:pt x="56945" y="648615"/>
+                  </a:lnTo>
+                  <a:lnTo>
+                    <a:pt x="128567" y="1282120"/>
+                  </a:lnTo>
+                  <a:lnTo>
+                    <a:pt x="200190" y="1774069"/>
+                  </a:lnTo>
+                  <a:lnTo>
+                    <a:pt x="271812" y="2156093"/>
+                  </a:lnTo>
+                  <a:lnTo>
+                    <a:pt x="343435" y="2452754"/>
+                  </a:lnTo>
+                  <a:lnTo>
+                    <a:pt x="415057" y="2650582"/>
+                  </a:lnTo>
+                  <a:lnTo>
+                    <a:pt x="486680" y="2623658"/>
+                  </a:lnTo>
+                  <a:lnTo>
+                    <a:pt x="558303" y="2595863"/>
+                  </a:lnTo>
+                  <a:lnTo>
+                    <a:pt x="629925" y="2567171"/>
+                  </a:lnTo>
+                  <a:lnTo>
+                    <a:pt x="701548" y="2537551"/>
+                  </a:lnTo>
+                  <a:lnTo>
+                    <a:pt x="773170" y="2506974"/>
+                  </a:lnTo>
+                  <a:lnTo>
+                    <a:pt x="844793" y="2475408"/>
+                  </a:lnTo>
+                  <a:lnTo>
+                    <a:pt x="916415" y="2442823"/>
+                  </a:lnTo>
+                  <a:lnTo>
+                    <a:pt x="988038" y="2409184"/>
+                  </a:lnTo>
+                  <a:lnTo>
+                    <a:pt x="1059660" y="2374459"/>
+                  </a:lnTo>
+                  <a:lnTo>
+                    <a:pt x="1131283" y="2338611"/>
+                  </a:lnTo>
+                  <a:lnTo>
+                    <a:pt x="1202905" y="2301605"/>
+                  </a:lnTo>
+                  <a:lnTo>
+                    <a:pt x="1274528" y="2263403"/>
+                  </a:lnTo>
+                  <a:lnTo>
+                    <a:pt x="1346150" y="2223967"/>
+                  </a:lnTo>
+                  <a:lnTo>
+                    <a:pt x="1417773" y="2183256"/>
+                  </a:lnTo>
+                  <a:lnTo>
+                    <a:pt x="1489395" y="2141229"/>
+                  </a:lnTo>
+                  <a:lnTo>
+                    <a:pt x="1561018" y="2097845"/>
+                  </a:lnTo>
+                  <a:lnTo>
+                    <a:pt x="1632640" y="2053058"/>
+                  </a:lnTo>
+                  <a:lnTo>
+                    <a:pt x="1704263" y="2006824"/>
+                  </a:lnTo>
+                  <a:lnTo>
+                    <a:pt x="1775885" y="1959096"/>
+                  </a:lnTo>
+                  <a:lnTo>
+                    <a:pt x="1847508" y="1909825"/>
+                  </a:lnTo>
+                  <a:lnTo>
+                    <a:pt x="1919131" y="1858963"/>
+                  </a:lnTo>
+                  <a:lnTo>
+                    <a:pt x="1990753" y="1806456"/>
+                  </a:lnTo>
+                  <a:lnTo>
+                    <a:pt x="2062376" y="1752253"/>
+                  </a:lnTo>
+                  <a:lnTo>
+                    <a:pt x="2133998" y="1696298"/>
+                  </a:lnTo>
+                  <a:lnTo>
+                    <a:pt x="2205621" y="1638535"/>
+                  </a:lnTo>
+                  <a:lnTo>
+                    <a:pt x="2277243" y="1578906"/>
+                  </a:lnTo>
+                  <a:lnTo>
+                    <a:pt x="2348866" y="1517349"/>
+                  </a:lnTo>
+                  <a:lnTo>
+                    <a:pt x="2420488" y="1453803"/>
+                  </a:lnTo>
+                  <a:lnTo>
+                    <a:pt x="2492111" y="1388204"/>
+                  </a:lnTo>
+                  <a:lnTo>
+                    <a:pt x="2563733" y="1320484"/>
+                  </a:lnTo>
+                  <a:lnTo>
+                    <a:pt x="2635356" y="1250576"/>
+                  </a:lnTo>
+                  <a:lnTo>
+                    <a:pt x="2706978" y="1178409"/>
+                  </a:lnTo>
+                  <a:lnTo>
+                    <a:pt x="2778601" y="1103910"/>
+                  </a:lnTo>
+                  <a:lnTo>
+                    <a:pt x="2850223" y="1027004"/>
+                  </a:lnTo>
+                  <a:lnTo>
+                    <a:pt x="2921846" y="947612"/>
+                  </a:lnTo>
+                  <a:lnTo>
+                    <a:pt x="2993468" y="865654"/>
+                  </a:lnTo>
+                  <a:lnTo>
+                    <a:pt x="3065091" y="781048"/>
+                  </a:lnTo>
+                  <a:lnTo>
+                    <a:pt x="3136713" y="693708"/>
+                  </a:lnTo>
+                  <a:lnTo>
+                    <a:pt x="3208336" y="603545"/>
+                  </a:lnTo>
+                  <a:lnTo>
+                    <a:pt x="3279959" y="510469"/>
+                  </a:lnTo>
+                  <a:lnTo>
+                    <a:pt x="3351581" y="414385"/>
+                  </a:lnTo>
+                  <a:lnTo>
+                    <a:pt x="3423204" y="315196"/>
+                  </a:lnTo>
+                  <a:lnTo>
+                    <a:pt x="3494826" y="212801"/>
+                  </a:lnTo>
+                  <a:lnTo>
+                    <a:pt x="3566449" y="107098"/>
+                  </a:lnTo>
+                  <a:lnTo>
+                    <a:pt x="3636744" y="0"/>
                   </a:lnTo>
                 </a:path>
               </a:pathLst>
@@ -4063,312 +4063,312 @@
           </p:nvSpPr>
           <p:spPr>
             <a:xfrm>
-              <a:off x="1172049" y="4748271"/>
-              <a:ext cx="7090630" cy="808978"/>
+              <a:off x="1172049" y="4750167"/>
+              <a:ext cx="7090630" cy="807081"/>
             </a:xfrm>
             <a:custGeom>
               <a:avLst/>
               <a:pathLst>
-                <a:path w="7090630" h="808978">
+                <a:path w="7090630" h="807081">
                   <a:moveTo>
-                    <a:pt x="7090630" y="808978"/>
+                    <a:pt x="7090630" y="807081"/>
                   </a:moveTo>
                   <a:lnTo>
-                    <a:pt x="7019007" y="808978"/>
-                  </a:lnTo>
-                  <a:lnTo>
-                    <a:pt x="6947385" y="808978"/>
-                  </a:lnTo>
-                  <a:lnTo>
-                    <a:pt x="6875762" y="808977"/>
-                  </a:lnTo>
-                  <a:lnTo>
-                    <a:pt x="6804139" y="808977"/>
-                  </a:lnTo>
-                  <a:lnTo>
-                    <a:pt x="6732517" y="808977"/>
-                  </a:lnTo>
-                  <a:lnTo>
-                    <a:pt x="6660894" y="808976"/>
-                  </a:lnTo>
-                  <a:lnTo>
-                    <a:pt x="6589272" y="808976"/>
-                  </a:lnTo>
-                  <a:lnTo>
-                    <a:pt x="6517649" y="808975"/>
-                  </a:lnTo>
-                  <a:lnTo>
-                    <a:pt x="6446027" y="808974"/>
-                  </a:lnTo>
-                  <a:lnTo>
-                    <a:pt x="6374404" y="808973"/>
-                  </a:lnTo>
-                  <a:lnTo>
-                    <a:pt x="6302782" y="808971"/>
-                  </a:lnTo>
-                  <a:lnTo>
-                    <a:pt x="6231159" y="808969"/>
-                  </a:lnTo>
-                  <a:lnTo>
-                    <a:pt x="6159537" y="808967"/>
-                  </a:lnTo>
-                  <a:lnTo>
-                    <a:pt x="6087914" y="808963"/>
-                  </a:lnTo>
-                  <a:lnTo>
-                    <a:pt x="6016292" y="808959"/>
-                  </a:lnTo>
-                  <a:lnTo>
-                    <a:pt x="5944669" y="808954"/>
-                  </a:lnTo>
-                  <a:lnTo>
-                    <a:pt x="5873047" y="808946"/>
-                  </a:lnTo>
-                  <a:lnTo>
-                    <a:pt x="5801424" y="808937"/>
-                  </a:lnTo>
-                  <a:lnTo>
-                    <a:pt x="5729802" y="808925"/>
-                  </a:lnTo>
-                  <a:lnTo>
-                    <a:pt x="5658179" y="808910"/>
-                  </a:lnTo>
-                  <a:lnTo>
-                    <a:pt x="5586557" y="808891"/>
-                  </a:lnTo>
-                  <a:lnTo>
-                    <a:pt x="5514934" y="808866"/>
-                  </a:lnTo>
-                  <a:lnTo>
-                    <a:pt x="5443311" y="808833"/>
-                  </a:lnTo>
-                  <a:lnTo>
-                    <a:pt x="5371689" y="808791"/>
-                  </a:lnTo>
-                  <a:lnTo>
-                    <a:pt x="5300066" y="808737"/>
-                  </a:lnTo>
-                  <a:lnTo>
-                    <a:pt x="5228444" y="808668"/>
-                  </a:lnTo>
-                  <a:lnTo>
-                    <a:pt x="5156821" y="808579"/>
-                  </a:lnTo>
-                  <a:lnTo>
-                    <a:pt x="5085199" y="808464"/>
-                  </a:lnTo>
-                  <a:lnTo>
-                    <a:pt x="5013576" y="808316"/>
-                  </a:lnTo>
-                  <a:lnTo>
-                    <a:pt x="4941954" y="808126"/>
-                  </a:lnTo>
-                  <a:lnTo>
-                    <a:pt x="4870331" y="807880"/>
-                  </a:lnTo>
-                  <a:lnTo>
-                    <a:pt x="4798709" y="807565"/>
-                  </a:lnTo>
-                  <a:lnTo>
-                    <a:pt x="4727086" y="807158"/>
-                  </a:lnTo>
-                  <a:lnTo>
-                    <a:pt x="4655464" y="806634"/>
-                  </a:lnTo>
-                  <a:lnTo>
-                    <a:pt x="4583841" y="805960"/>
-                  </a:lnTo>
-                  <a:lnTo>
-                    <a:pt x="4512219" y="805092"/>
-                  </a:lnTo>
-                  <a:lnTo>
-                    <a:pt x="4440596" y="803974"/>
-                  </a:lnTo>
-                  <a:lnTo>
-                    <a:pt x="4368974" y="802534"/>
-                  </a:lnTo>
-                  <a:lnTo>
-                    <a:pt x="4297351" y="800681"/>
-                  </a:lnTo>
-                  <a:lnTo>
-                    <a:pt x="4225729" y="798294"/>
-                  </a:lnTo>
-                  <a:lnTo>
-                    <a:pt x="4154106" y="795221"/>
-                  </a:lnTo>
-                  <a:lnTo>
-                    <a:pt x="4082483" y="791263"/>
-                  </a:lnTo>
-                  <a:lnTo>
-                    <a:pt x="4010861" y="786167"/>
-                  </a:lnTo>
-                  <a:lnTo>
-                    <a:pt x="3939238" y="779605"/>
-                  </a:lnTo>
-                  <a:lnTo>
-                    <a:pt x="3867616" y="771156"/>
-                  </a:lnTo>
-                  <a:lnTo>
-                    <a:pt x="3795993" y="760276"/>
-                  </a:lnTo>
-                  <a:lnTo>
-                    <a:pt x="3724371" y="746267"/>
-                  </a:lnTo>
-                  <a:lnTo>
-                    <a:pt x="3652748" y="728227"/>
-                  </a:lnTo>
-                  <a:lnTo>
-                    <a:pt x="3581126" y="704999"/>
-                  </a:lnTo>
-                  <a:lnTo>
-                    <a:pt x="3509503" y="675088"/>
-                  </a:lnTo>
-                  <a:lnTo>
-                    <a:pt x="3437881" y="636574"/>
-                  </a:lnTo>
-                  <a:lnTo>
-                    <a:pt x="3366258" y="586980"/>
-                  </a:lnTo>
-                  <a:lnTo>
-                    <a:pt x="3294636" y="523121"/>
-                  </a:lnTo>
-                  <a:lnTo>
-                    <a:pt x="3223013" y="440892"/>
-                  </a:lnTo>
-                  <a:lnTo>
-                    <a:pt x="3151391" y="335009"/>
-                  </a:lnTo>
-                  <a:lnTo>
-                    <a:pt x="3079768" y="198669"/>
-                  </a:lnTo>
-                  <a:lnTo>
-                    <a:pt x="3008146" y="23109"/>
+                    <a:pt x="7019007" y="807081"/>
+                  </a:lnTo>
+                  <a:lnTo>
+                    <a:pt x="6947385" y="807081"/>
+                  </a:lnTo>
+                  <a:lnTo>
+                    <a:pt x="6875762" y="807081"/>
+                  </a:lnTo>
+                  <a:lnTo>
+                    <a:pt x="6804139" y="807081"/>
+                  </a:lnTo>
+                  <a:lnTo>
+                    <a:pt x="6732517" y="807080"/>
+                  </a:lnTo>
+                  <a:lnTo>
+                    <a:pt x="6660894" y="807080"/>
+                  </a:lnTo>
+                  <a:lnTo>
+                    <a:pt x="6589272" y="807079"/>
+                  </a:lnTo>
+                  <a:lnTo>
+                    <a:pt x="6517649" y="807079"/>
+                  </a:lnTo>
+                  <a:lnTo>
+                    <a:pt x="6446027" y="807078"/>
+                  </a:lnTo>
+                  <a:lnTo>
+                    <a:pt x="6374404" y="807076"/>
+                  </a:lnTo>
+                  <a:lnTo>
+                    <a:pt x="6302782" y="807075"/>
+                  </a:lnTo>
+                  <a:lnTo>
+                    <a:pt x="6231159" y="807073"/>
+                  </a:lnTo>
+                  <a:lnTo>
+                    <a:pt x="6159537" y="807070"/>
+                  </a:lnTo>
+                  <a:lnTo>
+                    <a:pt x="6087914" y="807067"/>
+                  </a:lnTo>
+                  <a:lnTo>
+                    <a:pt x="6016292" y="807062"/>
+                  </a:lnTo>
+                  <a:lnTo>
+                    <a:pt x="5944669" y="807057"/>
+                  </a:lnTo>
+                  <a:lnTo>
+                    <a:pt x="5873047" y="807049"/>
+                  </a:lnTo>
+                  <a:lnTo>
+                    <a:pt x="5801424" y="807040"/>
+                  </a:lnTo>
+                  <a:lnTo>
+                    <a:pt x="5729802" y="807028"/>
+                  </a:lnTo>
+                  <a:lnTo>
+                    <a:pt x="5658179" y="807013"/>
+                  </a:lnTo>
+                  <a:lnTo>
+                    <a:pt x="5586557" y="806993"/>
+                  </a:lnTo>
+                  <a:lnTo>
+                    <a:pt x="5514934" y="806967"/>
+                  </a:lnTo>
+                  <a:lnTo>
+                    <a:pt x="5443311" y="806934"/>
+                  </a:lnTo>
+                  <a:lnTo>
+                    <a:pt x="5371689" y="806892"/>
+                  </a:lnTo>
+                  <a:lnTo>
+                    <a:pt x="5300066" y="806837"/>
+                  </a:lnTo>
+                  <a:lnTo>
+                    <a:pt x="5228444" y="806767"/>
+                  </a:lnTo>
+                  <a:lnTo>
+                    <a:pt x="5156821" y="806676"/>
+                  </a:lnTo>
+                  <a:lnTo>
+                    <a:pt x="5085199" y="806559"/>
+                  </a:lnTo>
+                  <a:lnTo>
+                    <a:pt x="5013576" y="806409"/>
+                  </a:lnTo>
+                  <a:lnTo>
+                    <a:pt x="4941954" y="806215"/>
+                  </a:lnTo>
+                  <a:lnTo>
+                    <a:pt x="4870331" y="805965"/>
+                  </a:lnTo>
+                  <a:lnTo>
+                    <a:pt x="4798709" y="805644"/>
+                  </a:lnTo>
+                  <a:lnTo>
+                    <a:pt x="4727086" y="805230"/>
+                  </a:lnTo>
+                  <a:lnTo>
+                    <a:pt x="4655464" y="804698"/>
+                  </a:lnTo>
+                  <a:lnTo>
+                    <a:pt x="4583841" y="804012"/>
+                  </a:lnTo>
+                  <a:lnTo>
+                    <a:pt x="4512219" y="803128"/>
+                  </a:lnTo>
+                  <a:lnTo>
+                    <a:pt x="4440596" y="801990"/>
+                  </a:lnTo>
+                  <a:lnTo>
+                    <a:pt x="4368974" y="800525"/>
+                  </a:lnTo>
+                  <a:lnTo>
+                    <a:pt x="4297351" y="798639"/>
+                  </a:lnTo>
+                  <a:lnTo>
+                    <a:pt x="4225729" y="796209"/>
+                  </a:lnTo>
+                  <a:lnTo>
+                    <a:pt x="4154106" y="793081"/>
+                  </a:lnTo>
+                  <a:lnTo>
+                    <a:pt x="4082483" y="789052"/>
+                  </a:lnTo>
+                  <a:lnTo>
+                    <a:pt x="4010861" y="783864"/>
+                  </a:lnTo>
+                  <a:lnTo>
+                    <a:pt x="3939238" y="777184"/>
+                  </a:lnTo>
+                  <a:lnTo>
+                    <a:pt x="3867616" y="768581"/>
+                  </a:lnTo>
+                  <a:lnTo>
+                    <a:pt x="3795993" y="757502"/>
+                  </a:lnTo>
+                  <a:lnTo>
+                    <a:pt x="3724371" y="743236"/>
+                  </a:lnTo>
+                  <a:lnTo>
+                    <a:pt x="3652748" y="724865"/>
+                  </a:lnTo>
+                  <a:lnTo>
+                    <a:pt x="3581126" y="701208"/>
+                  </a:lnTo>
+                  <a:lnTo>
+                    <a:pt x="3509503" y="670743"/>
+                  </a:lnTo>
+                  <a:lnTo>
+                    <a:pt x="3437881" y="631512"/>
+                  </a:lnTo>
+                  <a:lnTo>
+                    <a:pt x="3366258" y="580993"/>
+                  </a:lnTo>
+                  <a:lnTo>
+                    <a:pt x="3294636" y="515938"/>
+                  </a:lnTo>
+                  <a:lnTo>
+                    <a:pt x="3223013" y="432163"/>
+                  </a:lnTo>
+                  <a:lnTo>
+                    <a:pt x="3151391" y="324282"/>
+                  </a:lnTo>
+                  <a:lnTo>
+                    <a:pt x="3079768" y="185359"/>
+                  </a:lnTo>
+                  <a:lnTo>
+                    <a:pt x="3008146" y="6463"/>
                   </a:lnTo>
                   <a:lnTo>
                     <a:pt x="2936523" y="0"/>
                   </a:lnTo>
                   <a:lnTo>
-                    <a:pt x="2864901" y="25317"/>
-                  </a:lnTo>
-                  <a:lnTo>
-                    <a:pt x="2793278" y="49843"/>
-                  </a:lnTo>
-                  <a:lnTo>
-                    <a:pt x="2721655" y="73601"/>
-                  </a:lnTo>
-                  <a:lnTo>
-                    <a:pt x="2650033" y="96615"/>
-                  </a:lnTo>
-                  <a:lnTo>
-                    <a:pt x="2578410" y="118909"/>
-                  </a:lnTo>
-                  <a:lnTo>
-                    <a:pt x="2506788" y="140506"/>
-                  </a:lnTo>
-                  <a:lnTo>
-                    <a:pt x="2435165" y="161426"/>
-                  </a:lnTo>
-                  <a:lnTo>
-                    <a:pt x="2363543" y="181692"/>
-                  </a:lnTo>
-                  <a:lnTo>
-                    <a:pt x="2291920" y="201324"/>
-                  </a:lnTo>
-                  <a:lnTo>
-                    <a:pt x="2220298" y="220341"/>
-                  </a:lnTo>
-                  <a:lnTo>
-                    <a:pt x="2148675" y="238763"/>
-                  </a:lnTo>
-                  <a:lnTo>
-                    <a:pt x="2077053" y="256608"/>
-                  </a:lnTo>
-                  <a:lnTo>
-                    <a:pt x="2005430" y="273895"/>
-                  </a:lnTo>
-                  <a:lnTo>
-                    <a:pt x="1933808" y="290641"/>
-                  </a:lnTo>
-                  <a:lnTo>
-                    <a:pt x="1862185" y="306863"/>
-                  </a:lnTo>
-                  <a:lnTo>
-                    <a:pt x="1790563" y="322577"/>
-                  </a:lnTo>
-                  <a:lnTo>
-                    <a:pt x="1718940" y="337800"/>
-                  </a:lnTo>
-                  <a:lnTo>
-                    <a:pt x="1647318" y="352546"/>
-                  </a:lnTo>
-                  <a:lnTo>
-                    <a:pt x="1575695" y="366830"/>
-                  </a:lnTo>
-                  <a:lnTo>
-                    <a:pt x="1504073" y="380668"/>
-                  </a:lnTo>
-                  <a:lnTo>
-                    <a:pt x="1432450" y="394072"/>
-                  </a:lnTo>
-                  <a:lnTo>
-                    <a:pt x="1360827" y="407057"/>
-                  </a:lnTo>
-                  <a:lnTo>
-                    <a:pt x="1289205" y="419636"/>
-                  </a:lnTo>
-                  <a:lnTo>
-                    <a:pt x="1217582" y="431821"/>
-                  </a:lnTo>
-                  <a:lnTo>
-                    <a:pt x="1145960" y="443624"/>
-                  </a:lnTo>
-                  <a:lnTo>
-                    <a:pt x="1074337" y="455058"/>
-                  </a:lnTo>
-                  <a:lnTo>
-                    <a:pt x="1002715" y="466135"/>
-                  </a:lnTo>
-                  <a:lnTo>
-                    <a:pt x="931092" y="476864"/>
-                  </a:lnTo>
-                  <a:lnTo>
-                    <a:pt x="859470" y="487258"/>
-                  </a:lnTo>
-                  <a:lnTo>
-                    <a:pt x="787847" y="497327"/>
-                  </a:lnTo>
-                  <a:lnTo>
-                    <a:pt x="716225" y="507080"/>
-                  </a:lnTo>
-                  <a:lnTo>
-                    <a:pt x="644602" y="516528"/>
-                  </a:lnTo>
-                  <a:lnTo>
-                    <a:pt x="572980" y="525681"/>
-                  </a:lnTo>
-                  <a:lnTo>
-                    <a:pt x="501357" y="534547"/>
-                  </a:lnTo>
-                  <a:lnTo>
-                    <a:pt x="429735" y="543136"/>
-                  </a:lnTo>
-                  <a:lnTo>
-                    <a:pt x="358112" y="551455"/>
-                  </a:lnTo>
-                  <a:lnTo>
-                    <a:pt x="286490" y="559515"/>
-                  </a:lnTo>
-                  <a:lnTo>
-                    <a:pt x="214867" y="567322"/>
-                  </a:lnTo>
-                  <a:lnTo>
-                    <a:pt x="143245" y="574885"/>
-                  </a:lnTo>
-                  <a:lnTo>
-                    <a:pt x="71622" y="582211"/>
-                  </a:lnTo>
-                  <a:lnTo>
-                    <a:pt x="0" y="589308"/>
+                    <a:pt x="2864901" y="25265"/>
+                  </a:lnTo>
+                  <a:lnTo>
+                    <a:pt x="2793278" y="49739"/>
+                  </a:lnTo>
+                  <a:lnTo>
+                    <a:pt x="2721655" y="73447"/>
+                  </a:lnTo>
+                  <a:lnTo>
+                    <a:pt x="2650033" y="96413"/>
+                  </a:lnTo>
+                  <a:lnTo>
+                    <a:pt x="2578410" y="118660"/>
+                  </a:lnTo>
+                  <a:lnTo>
+                    <a:pt x="2506788" y="140210"/>
+                  </a:lnTo>
+                  <a:lnTo>
+                    <a:pt x="2435165" y="161086"/>
+                  </a:lnTo>
+                  <a:lnTo>
+                    <a:pt x="2363543" y="181309"/>
+                  </a:lnTo>
+                  <a:lnTo>
+                    <a:pt x="2291920" y="200898"/>
+                  </a:lnTo>
+                  <a:lnTo>
+                    <a:pt x="2220298" y="219874"/>
+                  </a:lnTo>
+                  <a:lnTo>
+                    <a:pt x="2148675" y="238256"/>
+                  </a:lnTo>
+                  <a:lnTo>
+                    <a:pt x="2077053" y="256063"/>
+                  </a:lnTo>
+                  <a:lnTo>
+                    <a:pt x="2005430" y="273312"/>
+                  </a:lnTo>
+                  <a:lnTo>
+                    <a:pt x="1933808" y="290022"/>
+                  </a:lnTo>
+                  <a:lnTo>
+                    <a:pt x="1862185" y="306208"/>
+                  </a:lnTo>
+                  <a:lnTo>
+                    <a:pt x="1790563" y="321887"/>
+                  </a:lnTo>
+                  <a:lnTo>
+                    <a:pt x="1718940" y="337076"/>
+                  </a:lnTo>
+                  <a:lnTo>
+                    <a:pt x="1647318" y="351789"/>
+                  </a:lnTo>
+                  <a:lnTo>
+                    <a:pt x="1575695" y="366042"/>
+                  </a:lnTo>
+                  <a:lnTo>
+                    <a:pt x="1504073" y="379848"/>
+                  </a:lnTo>
+                  <a:lnTo>
+                    <a:pt x="1432450" y="393223"/>
+                  </a:lnTo>
+                  <a:lnTo>
+                    <a:pt x="1360827" y="406178"/>
+                  </a:lnTo>
+                  <a:lnTo>
+                    <a:pt x="1289205" y="418728"/>
+                  </a:lnTo>
+                  <a:lnTo>
+                    <a:pt x="1217582" y="430885"/>
+                  </a:lnTo>
+                  <a:lnTo>
+                    <a:pt x="1145960" y="442662"/>
+                  </a:lnTo>
+                  <a:lnTo>
+                    <a:pt x="1074337" y="454070"/>
+                  </a:lnTo>
+                  <a:lnTo>
+                    <a:pt x="1002715" y="465121"/>
+                  </a:lnTo>
+                  <a:lnTo>
+                    <a:pt x="931092" y="475825"/>
+                  </a:lnTo>
+                  <a:lnTo>
+                    <a:pt x="859470" y="486195"/>
+                  </a:lnTo>
+                  <a:lnTo>
+                    <a:pt x="787847" y="496240"/>
+                  </a:lnTo>
+                  <a:lnTo>
+                    <a:pt x="716225" y="505971"/>
+                  </a:lnTo>
+                  <a:lnTo>
+                    <a:pt x="644602" y="515397"/>
+                  </a:lnTo>
+                  <a:lnTo>
+                    <a:pt x="572980" y="524528"/>
+                  </a:lnTo>
+                  <a:lnTo>
+                    <a:pt x="501357" y="533373"/>
+                  </a:lnTo>
+                  <a:lnTo>
+                    <a:pt x="429735" y="541941"/>
+                  </a:lnTo>
+                  <a:lnTo>
+                    <a:pt x="358112" y="550241"/>
+                  </a:lnTo>
+                  <a:lnTo>
+                    <a:pt x="286490" y="558282"/>
+                  </a:lnTo>
+                  <a:lnTo>
+                    <a:pt x="214867" y="566070"/>
+                  </a:lnTo>
+                  <a:lnTo>
+                    <a:pt x="143245" y="573615"/>
+                  </a:lnTo>
+                  <a:lnTo>
+                    <a:pt x="71622" y="580923"/>
+                  </a:lnTo>
+                  <a:lnTo>
+                    <a:pt x="0" y="588003"/>
                   </a:lnTo>
                 </a:path>
               </a:pathLst>
@@ -4388,228 +4388,228 @@
           </p:nvSpPr>
           <p:spPr>
             <a:xfrm>
-              <a:off x="3235468" y="2073503"/>
-              <a:ext cx="5027211" cy="3482258"/>
+              <a:off x="3240779" y="2073503"/>
+              <a:ext cx="5021899" cy="3482248"/>
             </a:xfrm>
             <a:custGeom>
               <a:avLst/>
               <a:pathLst>
-                <a:path w="5027211" h="3482258">
+                <a:path w="5021899" h="3482248">
                   <a:moveTo>
                     <a:pt x="0" y="0"/>
                   </a:moveTo>
                   <a:lnTo>
-                    <a:pt x="13634" y="75807"/>
-                  </a:lnTo>
-                  <a:lnTo>
-                    <a:pt x="85256" y="432367"/>
-                  </a:lnTo>
-                  <a:lnTo>
-                    <a:pt x="156879" y="751622"/>
-                  </a:lnTo>
-                  <a:lnTo>
-                    <a:pt x="228501" y="1037474"/>
-                  </a:lnTo>
-                  <a:lnTo>
-                    <a:pt x="300124" y="1293418"/>
-                  </a:lnTo>
-                  <a:lnTo>
-                    <a:pt x="371746" y="1522584"/>
-                  </a:lnTo>
-                  <a:lnTo>
-                    <a:pt x="443369" y="1727773"/>
-                  </a:lnTo>
-                  <a:lnTo>
-                    <a:pt x="514992" y="1911494"/>
-                  </a:lnTo>
-                  <a:lnTo>
-                    <a:pt x="586614" y="2075993"/>
-                  </a:lnTo>
-                  <a:lnTo>
-                    <a:pt x="658237" y="2223281"/>
-                  </a:lnTo>
-                  <a:lnTo>
-                    <a:pt x="729859" y="2355159"/>
-                  </a:lnTo>
-                  <a:lnTo>
-                    <a:pt x="801482" y="2473239"/>
-                  </a:lnTo>
-                  <a:lnTo>
-                    <a:pt x="873104" y="2578964"/>
-                  </a:lnTo>
-                  <a:lnTo>
-                    <a:pt x="944727" y="2673628"/>
-                  </a:lnTo>
-                  <a:lnTo>
-                    <a:pt x="1016349" y="2758388"/>
-                  </a:lnTo>
-                  <a:lnTo>
-                    <a:pt x="1087972" y="2834280"/>
-                  </a:lnTo>
-                  <a:lnTo>
-                    <a:pt x="1159594" y="2902231"/>
-                  </a:lnTo>
-                  <a:lnTo>
-                    <a:pt x="1231217" y="2963073"/>
-                  </a:lnTo>
-                  <a:lnTo>
-                    <a:pt x="1302839" y="3017549"/>
-                  </a:lnTo>
-                  <a:lnTo>
-                    <a:pt x="1374462" y="3066325"/>
-                  </a:lnTo>
-                  <a:lnTo>
-                    <a:pt x="1446084" y="3109999"/>
-                  </a:lnTo>
-                  <a:lnTo>
-                    <a:pt x="1517707" y="3149102"/>
-                  </a:lnTo>
-                  <a:lnTo>
-                    <a:pt x="1589329" y="3184115"/>
-                  </a:lnTo>
-                  <a:lnTo>
-                    <a:pt x="1660952" y="3215464"/>
-                  </a:lnTo>
-                  <a:lnTo>
-                    <a:pt x="1732574" y="3243534"/>
-                  </a:lnTo>
-                  <a:lnTo>
-                    <a:pt x="1804197" y="3268666"/>
-                  </a:lnTo>
-                  <a:lnTo>
-                    <a:pt x="1875820" y="3291169"/>
-                  </a:lnTo>
-                  <a:lnTo>
-                    <a:pt x="1947442" y="3311318"/>
-                  </a:lnTo>
-                  <a:lnTo>
-                    <a:pt x="2019065" y="3329358"/>
-                  </a:lnTo>
-                  <a:lnTo>
-                    <a:pt x="2090687" y="3345512"/>
-                  </a:lnTo>
-                  <a:lnTo>
-                    <a:pt x="2162310" y="3359975"/>
-                  </a:lnTo>
-                  <a:lnTo>
-                    <a:pt x="2233932" y="3372924"/>
-                  </a:lnTo>
-                  <a:lnTo>
-                    <a:pt x="2305555" y="3384519"/>
-                  </a:lnTo>
-                  <a:lnTo>
-                    <a:pt x="2377177" y="3394901"/>
-                  </a:lnTo>
-                  <a:lnTo>
-                    <a:pt x="2448800" y="3404197"/>
-                  </a:lnTo>
-                  <a:lnTo>
-                    <a:pt x="2520422" y="3412520"/>
-                  </a:lnTo>
-                  <a:lnTo>
-                    <a:pt x="2592045" y="3419972"/>
-                  </a:lnTo>
-                  <a:lnTo>
-                    <a:pt x="2663667" y="3426644"/>
-                  </a:lnTo>
-                  <a:lnTo>
-                    <a:pt x="2735290" y="3432619"/>
-                  </a:lnTo>
-                  <a:lnTo>
-                    <a:pt x="2806912" y="3437968"/>
-                  </a:lnTo>
-                  <a:lnTo>
-                    <a:pt x="2878535" y="3442758"/>
-                  </a:lnTo>
-                  <a:lnTo>
-                    <a:pt x="2950157" y="3447046"/>
-                  </a:lnTo>
-                  <a:lnTo>
-                    <a:pt x="3021780" y="3450886"/>
-                  </a:lnTo>
-                  <a:lnTo>
-                    <a:pt x="3093402" y="3454324"/>
-                  </a:lnTo>
-                  <a:lnTo>
-                    <a:pt x="3165025" y="3457402"/>
-                  </a:lnTo>
-                  <a:lnTo>
-                    <a:pt x="3236648" y="3460159"/>
-                  </a:lnTo>
-                  <a:lnTo>
-                    <a:pt x="3308270" y="3462627"/>
-                  </a:lnTo>
-                  <a:lnTo>
-                    <a:pt x="3379893" y="3464836"/>
-                  </a:lnTo>
-                  <a:lnTo>
-                    <a:pt x="3451515" y="3466815"/>
-                  </a:lnTo>
-                  <a:lnTo>
-                    <a:pt x="3523138" y="3468586"/>
-                  </a:lnTo>
-                  <a:lnTo>
-                    <a:pt x="3594760" y="3470172"/>
-                  </a:lnTo>
-                  <a:lnTo>
-                    <a:pt x="3666383" y="3471593"/>
-                  </a:lnTo>
-                  <a:lnTo>
-                    <a:pt x="3738005" y="3472864"/>
-                  </a:lnTo>
-                  <a:lnTo>
-                    <a:pt x="3809628" y="3474003"/>
-                  </a:lnTo>
-                  <a:lnTo>
-                    <a:pt x="3881250" y="3475022"/>
-                  </a:lnTo>
-                  <a:lnTo>
-                    <a:pt x="3952873" y="3475935"/>
-                  </a:lnTo>
-                  <a:lnTo>
-                    <a:pt x="4024495" y="3476752"/>
-                  </a:lnTo>
-                  <a:lnTo>
-                    <a:pt x="4096118" y="3477484"/>
-                  </a:lnTo>
-                  <a:lnTo>
-                    <a:pt x="4167740" y="3478139"/>
-                  </a:lnTo>
-                  <a:lnTo>
-                    <a:pt x="4239363" y="3478726"/>
-                  </a:lnTo>
-                  <a:lnTo>
-                    <a:pt x="4310985" y="3479251"/>
-                  </a:lnTo>
-                  <a:lnTo>
-                    <a:pt x="4382608" y="3479721"/>
-                  </a:lnTo>
-                  <a:lnTo>
-                    <a:pt x="4454230" y="3480143"/>
-                  </a:lnTo>
-                  <a:lnTo>
-                    <a:pt x="4525853" y="3480520"/>
-                  </a:lnTo>
-                  <a:lnTo>
-                    <a:pt x="4597476" y="3480857"/>
-                  </a:lnTo>
-                  <a:lnTo>
-                    <a:pt x="4669098" y="3481160"/>
-                  </a:lnTo>
-                  <a:lnTo>
-                    <a:pt x="4740721" y="3481430"/>
-                  </a:lnTo>
-                  <a:lnTo>
-                    <a:pt x="4812343" y="3481673"/>
-                  </a:lnTo>
-                  <a:lnTo>
-                    <a:pt x="4883966" y="3481890"/>
-                  </a:lnTo>
-                  <a:lnTo>
-                    <a:pt x="4955588" y="3482084"/>
-                  </a:lnTo>
-                  <a:lnTo>
-                    <a:pt x="5027211" y="3482258"/>
+                    <a:pt x="8322" y="46683"/>
+                  </a:lnTo>
+                  <a:lnTo>
+                    <a:pt x="79945" y="406381"/>
+                  </a:lnTo>
+                  <a:lnTo>
+                    <a:pt x="151567" y="728435"/>
+                  </a:lnTo>
+                  <a:lnTo>
+                    <a:pt x="223190" y="1016785"/>
+                  </a:lnTo>
+                  <a:lnTo>
+                    <a:pt x="294812" y="1274959"/>
+                  </a:lnTo>
+                  <a:lnTo>
+                    <a:pt x="366435" y="1506114"/>
+                  </a:lnTo>
+                  <a:lnTo>
+                    <a:pt x="438057" y="1713079"/>
+                  </a:lnTo>
+                  <a:lnTo>
+                    <a:pt x="509680" y="1898384"/>
+                  </a:lnTo>
+                  <a:lnTo>
+                    <a:pt x="581302" y="2064296"/>
+                  </a:lnTo>
+                  <a:lnTo>
+                    <a:pt x="652925" y="2212845"/>
+                  </a:lnTo>
+                  <a:lnTo>
+                    <a:pt x="724548" y="2345848"/>
+                  </a:lnTo>
+                  <a:lnTo>
+                    <a:pt x="796170" y="2464932"/>
+                  </a:lnTo>
+                  <a:lnTo>
+                    <a:pt x="867793" y="2571554"/>
+                  </a:lnTo>
+                  <a:lnTo>
+                    <a:pt x="939415" y="2667017"/>
+                  </a:lnTo>
+                  <a:lnTo>
+                    <a:pt x="1011038" y="2752490"/>
+                  </a:lnTo>
+                  <a:lnTo>
+                    <a:pt x="1082660" y="2829018"/>
+                  </a:lnTo>
+                  <a:lnTo>
+                    <a:pt x="1154283" y="2897537"/>
+                  </a:lnTo>
+                  <a:lnTo>
+                    <a:pt x="1225905" y="2958885"/>
+                  </a:lnTo>
+                  <a:lnTo>
+                    <a:pt x="1297528" y="3013813"/>
+                  </a:lnTo>
+                  <a:lnTo>
+                    <a:pt x="1369150" y="3062993"/>
+                  </a:lnTo>
+                  <a:lnTo>
+                    <a:pt x="1440773" y="3107026"/>
+                  </a:lnTo>
+                  <a:lnTo>
+                    <a:pt x="1512395" y="3146451"/>
+                  </a:lnTo>
+                  <a:lnTo>
+                    <a:pt x="1584018" y="3181749"/>
+                  </a:lnTo>
+                  <a:lnTo>
+                    <a:pt x="1655640" y="3213354"/>
+                  </a:lnTo>
+                  <a:lnTo>
+                    <a:pt x="1727263" y="3241651"/>
+                  </a:lnTo>
+                  <a:lnTo>
+                    <a:pt x="1798885" y="3266987"/>
+                  </a:lnTo>
+                  <a:lnTo>
+                    <a:pt x="1870508" y="3289672"/>
+                  </a:lnTo>
+                  <a:lnTo>
+                    <a:pt x="1942130" y="3309982"/>
+                  </a:lnTo>
+                  <a:lnTo>
+                    <a:pt x="2013753" y="3328167"/>
+                  </a:lnTo>
+                  <a:lnTo>
+                    <a:pt x="2085376" y="3344449"/>
+                  </a:lnTo>
+                  <a:lnTo>
+                    <a:pt x="2156998" y="3359027"/>
+                  </a:lnTo>
+                  <a:lnTo>
+                    <a:pt x="2228621" y="3372079"/>
+                  </a:lnTo>
+                  <a:lnTo>
+                    <a:pt x="2300243" y="3383765"/>
+                  </a:lnTo>
+                  <a:lnTo>
+                    <a:pt x="2371866" y="3394228"/>
+                  </a:lnTo>
+                  <a:lnTo>
+                    <a:pt x="2443488" y="3403597"/>
+                  </a:lnTo>
+                  <a:lnTo>
+                    <a:pt x="2515111" y="3411985"/>
+                  </a:lnTo>
+                  <a:lnTo>
+                    <a:pt x="2586733" y="3419495"/>
+                  </a:lnTo>
+                  <a:lnTo>
+                    <a:pt x="2658356" y="3426219"/>
+                  </a:lnTo>
+                  <a:lnTo>
+                    <a:pt x="2729978" y="3432239"/>
+                  </a:lnTo>
+                  <a:lnTo>
+                    <a:pt x="2801601" y="3437630"/>
+                  </a:lnTo>
+                  <a:lnTo>
+                    <a:pt x="2873223" y="3442456"/>
+                  </a:lnTo>
+                  <a:lnTo>
+                    <a:pt x="2944846" y="3446777"/>
+                  </a:lnTo>
+                  <a:lnTo>
+                    <a:pt x="3016468" y="3450646"/>
+                  </a:lnTo>
+                  <a:lnTo>
+                    <a:pt x="3088091" y="3454110"/>
+                  </a:lnTo>
+                  <a:lnTo>
+                    <a:pt x="3159713" y="3457212"/>
+                  </a:lnTo>
+                  <a:lnTo>
+                    <a:pt x="3231336" y="3459988"/>
+                  </a:lnTo>
+                  <a:lnTo>
+                    <a:pt x="3302958" y="3462475"/>
+                  </a:lnTo>
+                  <a:lnTo>
+                    <a:pt x="3374581" y="3464701"/>
+                  </a:lnTo>
+                  <a:lnTo>
+                    <a:pt x="3446204" y="3466694"/>
+                  </a:lnTo>
+                  <a:lnTo>
+                    <a:pt x="3517826" y="3468479"/>
+                  </a:lnTo>
+                  <a:lnTo>
+                    <a:pt x="3589449" y="3470076"/>
+                  </a:lnTo>
+                  <a:lnTo>
+                    <a:pt x="3661071" y="3471507"/>
+                  </a:lnTo>
+                  <a:lnTo>
+                    <a:pt x="3732694" y="3472788"/>
+                  </a:lnTo>
+                  <a:lnTo>
+                    <a:pt x="3804316" y="3473935"/>
+                  </a:lnTo>
+                  <a:lnTo>
+                    <a:pt x="3875939" y="3474962"/>
+                  </a:lnTo>
+                  <a:lnTo>
+                    <a:pt x="3947561" y="3475881"/>
+                  </a:lnTo>
+                  <a:lnTo>
+                    <a:pt x="4019184" y="3476704"/>
+                  </a:lnTo>
+                  <a:lnTo>
+                    <a:pt x="4090806" y="3477441"/>
+                  </a:lnTo>
+                  <a:lnTo>
+                    <a:pt x="4162429" y="3478101"/>
+                  </a:lnTo>
+                  <a:lnTo>
+                    <a:pt x="4234051" y="3478692"/>
+                  </a:lnTo>
+                  <a:lnTo>
+                    <a:pt x="4305674" y="3479221"/>
+                  </a:lnTo>
+                  <a:lnTo>
+                    <a:pt x="4377296" y="3479694"/>
+                  </a:lnTo>
+                  <a:lnTo>
+                    <a:pt x="4448919" y="3480118"/>
+                  </a:lnTo>
+                  <a:lnTo>
+                    <a:pt x="4520541" y="3480498"/>
+                  </a:lnTo>
+                  <a:lnTo>
+                    <a:pt x="4592164" y="3480838"/>
+                  </a:lnTo>
+                  <a:lnTo>
+                    <a:pt x="4663786" y="3481142"/>
+                  </a:lnTo>
+                  <a:lnTo>
+                    <a:pt x="4735409" y="3481415"/>
+                  </a:lnTo>
+                  <a:lnTo>
+                    <a:pt x="4807032" y="3481659"/>
+                  </a:lnTo>
+                  <a:lnTo>
+                    <a:pt x="4878654" y="3481877"/>
+                  </a:lnTo>
+                  <a:lnTo>
+                    <a:pt x="4950277" y="3482073"/>
+                  </a:lnTo>
+                  <a:lnTo>
+                    <a:pt x="5021899" y="3482248"/>
                   </a:lnTo>
                 </a:path>
               </a:pathLst>
@@ -4681,7 +4681,7 @@
           </p:nvSpPr>
           <p:spPr>
             <a:xfrm>
-              <a:off x="4164901" y="2073503"/>
+              <a:off x="4170171" y="2073503"/>
               <a:ext cx="0" cy="3649639"/>
             </a:xfrm>
             <a:custGeom>
@@ -4954,7 +4954,7 @@
           </p:nvSpPr>
           <p:spPr>
             <a:xfrm>
-              <a:off x="1382692" y="5785772"/>
+              <a:off x="1383511" y="5785772"/>
               <a:ext cx="161574" cy="80101"/>
             </a:xfrm>
             <a:prstGeom prst="rect">
@@ -5000,7 +5000,7 @@
           </p:nvSpPr>
           <p:spPr>
             <a:xfrm>
-              <a:off x="2284877" y="5785772"/>
+              <a:off x="2285456" y="5785772"/>
               <a:ext cx="161574" cy="80101"/>
             </a:xfrm>
             <a:prstGeom prst="rect">
@@ -5046,7 +5046,7 @@
           </p:nvSpPr>
           <p:spPr>
             <a:xfrm>
-              <a:off x="3187061" y="5785772"/>
+              <a:off x="3187401" y="5785772"/>
               <a:ext cx="161574" cy="80101"/>
             </a:xfrm>
             <a:prstGeom prst="rect">
@@ -5092,7 +5092,7 @@
           </p:nvSpPr>
           <p:spPr>
             <a:xfrm>
-              <a:off x="4138944" y="5785772"/>
+              <a:off x="4139043" y="5785772"/>
               <a:ext cx="62179" cy="80101"/>
             </a:xfrm>
             <a:prstGeom prst="rect">
@@ -5138,7 +5138,7 @@
           </p:nvSpPr>
           <p:spPr>
             <a:xfrm>
-              <a:off x="5010039" y="5785772"/>
+              <a:off x="5009898" y="5785772"/>
               <a:ext cx="124358" cy="80101"/>
             </a:xfrm>
             <a:prstGeom prst="rect">
@@ -5184,7 +5184,7 @@
           </p:nvSpPr>
           <p:spPr>
             <a:xfrm>
-              <a:off x="5912223" y="5785772"/>
+              <a:off x="5911843" y="5785772"/>
               <a:ext cx="124358" cy="80101"/>
             </a:xfrm>
             <a:prstGeom prst="rect">
@@ -5230,7 +5230,7 @@
           </p:nvSpPr>
           <p:spPr>
             <a:xfrm>
-              <a:off x="6814408" y="5785772"/>
+              <a:off x="6813788" y="5785772"/>
               <a:ext cx="124358" cy="80101"/>
             </a:xfrm>
             <a:prstGeom prst="rect">
@@ -5276,7 +5276,7 @@
           </p:nvSpPr>
           <p:spPr>
             <a:xfrm>
-              <a:off x="7716592" y="5785772"/>
+              <a:off x="7715733" y="5785772"/>
               <a:ext cx="124358" cy="80101"/>
             </a:xfrm>
             <a:prstGeom prst="rect">
@@ -5447,7 +5447,7 @@
                   <a:latin typeface="Helvetica"/>
                   <a:cs typeface="Helvetica"/>
                 </a:rPr>
-                <a:t>subHR per 10 % decline: 4.02 (0.67-24.16), p_Bonf = 0.768 (n = 6)  |  per IQR decline (Δ = 27.4 %): 45.64 (0.33-6253.85)  |  IQR: [-12.6, 14.8] %</a:t>
+                <a:t>subHR per 10 % decline: 4.02 (0.67-24.16), p_Bonf = 0.768 (n = 6)  |  per IQR decline (Δ = 27.2 %): 44.20 (0.34-5812.02)  |  IQR: [-12.3, 14.9] %</a:t>
               </a:r>
             </a:p>
           </p:txBody>
